--- a/docs/presentaciones/classes/clase-164-td-learning-q-learning-deep-q-networks-presentacion.pptx
+++ b/docs/presentaciones/classes/clase-164-td-learning-q-learning-deep-q-networks-presentacion.pptx
@@ -4823,7 +4823,7 @@
                 </a:solidFill>
                 <a:latin typeface="Segoe UI"/>
               </a:rPr>
-              <a:t>Primer bloque ejecutable del notebook.</a:t>
+              <a:t>` 0(S)  1     2     3 4     5(H)  6     7(H)</a:t>
             </a:r>
           </a:p>
         </p:txBody>
@@ -4910,7 +4910,387 @@
                 </a:solidFill>
                 <a:latin typeface="Courier New"/>
               </a:rPr>
-              <a:t># Imports y configuración inicial</a:t>
+              <a:t>import numpy as np</a:t>
+            </a:r>
+          </a:p>
+          <a:p>
+            <a:pPr>
+              <a:defRPr sz="1200" b="0">
+                <a:solidFill>
+                  <a:srgbClr val="F8FAFC"/>
+                </a:solidFill>
+                <a:latin typeface="Courier New"/>
+              </a:defRPr>
+            </a:pPr>
+            <a:r>
+              <a:rPr sz="1200" b="0">
+                <a:solidFill>
+                  <a:srgbClr val="F8FAFC"/>
+                </a:solidFill>
+                <a:latin typeface="Courier New"/>
+              </a:rPr>
+              <a:t>np.random.seed(42)</a:t>
+            </a:r>
+          </a:p>
+          <a:p>
+            <a:pPr>
+              <a:defRPr sz="1200" b="0">
+                <a:solidFill>
+                  <a:srgbClr val="F8FAFC"/>
+                </a:solidFill>
+                <a:latin typeface="Courier New"/>
+              </a:defRPr>
+            </a:pPr>
+            <a:r>
+              <a:rPr sz="1200" b="0">
+                <a:solidFill>
+                  <a:srgbClr val="F8FAFC"/>
+                </a:solidFill>
+                <a:latin typeface="Courier New"/>
+              </a:rPr>
+              <a:t> </a:t>
+            </a:r>
+          </a:p>
+          <a:p>
+            <a:pPr>
+              <a:defRPr sz="1200" b="0">
+                <a:solidFill>
+                  <a:srgbClr val="F8FAFC"/>
+                </a:solidFill>
+                <a:latin typeface="Courier New"/>
+              </a:defRPr>
+            </a:pPr>
+            <a:r>
+              <a:rPr sz="1200" b="0">
+                <a:solidFill>
+                  <a:srgbClr val="F8FAFC"/>
+                </a:solidFill>
+                <a:latin typeface="Courier New"/>
+              </a:rPr>
+              <a:t>nS, nA = 16, 4</a:t>
+            </a:r>
+          </a:p>
+          <a:p>
+            <a:pPr>
+              <a:defRPr sz="1200" b="0">
+                <a:solidFill>
+                  <a:srgbClr val="F8FAFC"/>
+                </a:solidFill>
+                <a:latin typeface="Courier New"/>
+              </a:defRPr>
+            </a:pPr>
+            <a:r>
+              <a:rPr sz="1200" b="0">
+                <a:solidFill>
+                  <a:srgbClr val="F8FAFC"/>
+                </a:solidFill>
+                <a:latin typeface="Courier New"/>
+              </a:rPr>
+              <a:t>holes = {5, 7, 11, 12}</a:t>
+            </a:r>
+          </a:p>
+          <a:p>
+            <a:pPr>
+              <a:defRPr sz="1200" b="0">
+                <a:solidFill>
+                  <a:srgbClr val="F8FAFC"/>
+                </a:solidFill>
+                <a:latin typeface="Courier New"/>
+              </a:defRPr>
+            </a:pPr>
+            <a:r>
+              <a:rPr sz="1200" b="0">
+                <a:solidFill>
+                  <a:srgbClr val="F8FAFC"/>
+                </a:solidFill>
+                <a:latin typeface="Courier New"/>
+              </a:rPr>
+              <a:t>goal = 15</a:t>
+            </a:r>
+          </a:p>
+          <a:p>
+            <a:pPr>
+              <a:defRPr sz="1200" b="0">
+                <a:solidFill>
+                  <a:srgbClr val="F8FAFC"/>
+                </a:solidFill>
+                <a:latin typeface="Courier New"/>
+              </a:defRPr>
+            </a:pPr>
+            <a:r>
+              <a:rPr sz="1200" b="0">
+                <a:solidFill>
+                  <a:srgbClr val="F8FAFC"/>
+                </a:solidFill>
+                <a:latin typeface="Courier New"/>
+              </a:rPr>
+              <a:t> </a:t>
+            </a:r>
+          </a:p>
+          <a:p>
+            <a:pPr>
+              <a:defRPr sz="1200" b="0">
+                <a:solidFill>
+                  <a:srgbClr val="F8FAFC"/>
+                </a:solidFill>
+                <a:latin typeface="Courier New"/>
+              </a:defRPr>
+            </a:pPr>
+            <a:r>
+              <a:rPr sz="1200" b="0">
+                <a:solidFill>
+                  <a:srgbClr val="F8FAFC"/>
+                </a:solidFill>
+                <a:latin typeface="Courier New"/>
+              </a:rPr>
+              <a:t>def next_state(s, a):</a:t>
+            </a:r>
+          </a:p>
+          <a:p>
+            <a:pPr>
+              <a:defRPr sz="1200" b="0">
+                <a:solidFill>
+                  <a:srgbClr val="F8FAFC"/>
+                </a:solidFill>
+                <a:latin typeface="Courier New"/>
+              </a:defRPr>
+            </a:pPr>
+            <a:r>
+              <a:rPr sz="1200" b="0">
+                <a:solidFill>
+                  <a:srgbClr val="F8FAFC"/>
+                </a:solidFill>
+                <a:latin typeface="Courier New"/>
+              </a:rPr>
+              <a:t>    row, col = divmod(s, 4)</a:t>
+            </a:r>
+          </a:p>
+          <a:p>
+            <a:pPr>
+              <a:defRPr sz="1200" b="0">
+                <a:solidFill>
+                  <a:srgbClr val="F8FAFC"/>
+                </a:solidFill>
+                <a:latin typeface="Courier New"/>
+              </a:defRPr>
+            </a:pPr>
+            <a:r>
+              <a:rPr sz="1200" b="0">
+                <a:solidFill>
+                  <a:srgbClr val="F8FAFC"/>
+                </a:solidFill>
+                <a:latin typeface="Courier New"/>
+              </a:rPr>
+              <a:t>    if   a == 0: col = max(col - 1, 0)</a:t>
+            </a:r>
+          </a:p>
+          <a:p>
+            <a:pPr>
+              <a:defRPr sz="1200" b="0">
+                <a:solidFill>
+                  <a:srgbClr val="F8FAFC"/>
+                </a:solidFill>
+                <a:latin typeface="Courier New"/>
+              </a:defRPr>
+            </a:pPr>
+            <a:r>
+              <a:rPr sz="1200" b="0">
+                <a:solidFill>
+                  <a:srgbClr val="F8FAFC"/>
+                </a:solidFill>
+                <a:latin typeface="Courier New"/>
+              </a:rPr>
+              <a:t>    elif a == 1: row = min(row + 1, 3)</a:t>
+            </a:r>
+          </a:p>
+          <a:p>
+            <a:pPr>
+              <a:defRPr sz="1200" b="0">
+                <a:solidFill>
+                  <a:srgbClr val="F8FAFC"/>
+                </a:solidFill>
+                <a:latin typeface="Courier New"/>
+              </a:defRPr>
+            </a:pPr>
+            <a:r>
+              <a:rPr sz="1200" b="0">
+                <a:solidFill>
+                  <a:srgbClr val="F8FAFC"/>
+                </a:solidFill>
+                <a:latin typeface="Courier New"/>
+              </a:rPr>
+              <a:t>    elif a == 2: col = min(col + 1, 3)</a:t>
+            </a:r>
+          </a:p>
+          <a:p>
+            <a:pPr>
+              <a:defRPr sz="1200" b="0">
+                <a:solidFill>
+                  <a:srgbClr val="F8FAFC"/>
+                </a:solidFill>
+                <a:latin typeface="Courier New"/>
+              </a:defRPr>
+            </a:pPr>
+            <a:r>
+              <a:rPr sz="1200" b="0">
+                <a:solidFill>
+                  <a:srgbClr val="F8FAFC"/>
+                </a:solidFill>
+                <a:latin typeface="Courier New"/>
+              </a:rPr>
+              <a:t>    elif a == 3: row = max(row - 1, 0)</a:t>
+            </a:r>
+          </a:p>
+          <a:p>
+            <a:pPr>
+              <a:defRPr sz="1200" b="0">
+                <a:solidFill>
+                  <a:srgbClr val="F8FAFC"/>
+                </a:solidFill>
+                <a:latin typeface="Courier New"/>
+              </a:defRPr>
+            </a:pPr>
+            <a:r>
+              <a:rPr sz="1200" b="0">
+                <a:solidFill>
+                  <a:srgbClr val="F8FAFC"/>
+                </a:solidFill>
+                <a:latin typeface="Courier New"/>
+              </a:rPr>
+              <a:t>    return row * 4 + col</a:t>
+            </a:r>
+          </a:p>
+          <a:p>
+            <a:pPr>
+              <a:defRPr sz="1200" b="0">
+                <a:solidFill>
+                  <a:srgbClr val="F8FAFC"/>
+                </a:solidFill>
+                <a:latin typeface="Courier New"/>
+              </a:defRPr>
+            </a:pPr>
+            <a:r>
+              <a:rPr sz="1200" b="0">
+                <a:solidFill>
+                  <a:srgbClr val="F8FAFC"/>
+                </a:solidFill>
+                <a:latin typeface="Courier New"/>
+              </a:rPr>
+              <a:t> </a:t>
+            </a:r>
+          </a:p>
+          <a:p>
+            <a:pPr>
+              <a:defRPr sz="1200" b="0">
+                <a:solidFill>
+                  <a:srgbClr val="F8FAFC"/>
+                </a:solidFill>
+                <a:latin typeface="Courier New"/>
+              </a:defRPr>
+            </a:pPr>
+            <a:r>
+              <a:rPr sz="1200" b="0">
+                <a:solidFill>
+                  <a:srgbClr val="F8FAFC"/>
+                </a:solidFill>
+                <a:latin typeface="Courier New"/>
+              </a:rPr>
+              <a:t>class GridWorld:</a:t>
+            </a:r>
+          </a:p>
+          <a:p>
+            <a:pPr>
+              <a:defRPr sz="1200" b="0">
+                <a:solidFill>
+                  <a:srgbClr val="F8FAFC"/>
+                </a:solidFill>
+                <a:latin typeface="Courier New"/>
+              </a:defRPr>
+            </a:pPr>
+            <a:r>
+              <a:rPr sz="1200" b="0">
+                <a:solidFill>
+                  <a:srgbClr val="F8FAFC"/>
+                </a:solidFill>
+                <a:latin typeface="Courier New"/>
+              </a:rPr>
+              <a:t>    def reset(self):</a:t>
+            </a:r>
+          </a:p>
+          <a:p>
+            <a:pPr>
+              <a:defRPr sz="1200" b="0">
+                <a:solidFill>
+                  <a:srgbClr val="F8FAFC"/>
+                </a:solidFill>
+                <a:latin typeface="Courier New"/>
+              </a:defRPr>
+            </a:pPr>
+            <a:r>
+              <a:rPr sz="1200" b="0">
+                <a:solidFill>
+                  <a:srgbClr val="F8FAFC"/>
+                </a:solidFill>
+                <a:latin typeface="Courier New"/>
+              </a:rPr>
+              <a:t>        self.s = 0</a:t>
+            </a:r>
+          </a:p>
+          <a:p>
+            <a:pPr>
+              <a:defRPr sz="1200" b="0">
+                <a:solidFill>
+                  <a:srgbClr val="F8FAFC"/>
+                </a:solidFill>
+                <a:latin typeface="Courier New"/>
+              </a:defRPr>
+            </a:pPr>
+            <a:r>
+              <a:rPr sz="1200" b="0">
+                <a:solidFill>
+                  <a:srgbClr val="F8FAFC"/>
+                </a:solidFill>
+                <a:latin typeface="Courier New"/>
+              </a:rPr>
+              <a:t>        return self.s</a:t>
+            </a:r>
+          </a:p>
+          <a:p>
+            <a:pPr>
+              <a:defRPr sz="1200" b="0">
+                <a:solidFill>
+                  <a:srgbClr val="F8FAFC"/>
+                </a:solidFill>
+                <a:latin typeface="Courier New"/>
+              </a:defRPr>
+            </a:pPr>
+            <a:r>
+              <a:rPr sz="1200" b="0">
+                <a:solidFill>
+                  <a:srgbClr val="F8FAFC"/>
+                </a:solidFill>
+                <a:latin typeface="Courier New"/>
+              </a:rPr>
+              <a:t>    def step(self, a):</a:t>
+            </a:r>
+          </a:p>
+          <a:p>
+            <a:pPr>
+              <a:defRPr sz="1200" b="0">
+                <a:solidFill>
+                  <a:srgbClr val="F8FAFC"/>
+                </a:solidFill>
+                <a:latin typeface="Courier New"/>
+              </a:defRPr>
+            </a:pPr>
+            <a:r>
+              <a:rPr sz="1200" b="0">
+                <a:solidFill>
+                  <a:srgbClr val="F8FAFC"/>
+                </a:solidFill>
+                <a:latin typeface="Courier New"/>
+              </a:rPr>
+              <a:t># ... (truncado)</a:t>
             </a:r>
           </a:p>
         </p:txBody>

--- a/docs/presentaciones/classes/clase-164-td-learning-q-learning-deep-q-networks-presentacion.pptx
+++ b/docs/presentaciones/classes/clase-164-td-learning-q-learning-deep-q-networks-presentacion.pptx
@@ -3272,7 +3272,7 @@
                 </a:solidFill>
                 <a:latin typeface="Segoe UI"/>
               </a:rPr>
-              <a:t>Parte: 2 — Deep Learning · Fuente: Géron, cap. 18 § Q-Learning y § Deep Q-Learning.  Duración estimada: 80 min.</a:t>
+              <a:t>Parte: 2 — Deep Learning · Fuente: Géron, cap. 18 § Q-Learning y § Deep Q-Learning.  Duración estimada: 80 min. · Nivel: Avanzado</a:t>
             </a:r>
           </a:p>
         </p:txBody>
@@ -3581,7 +3581,7 @@
                 </a:solidFill>
                 <a:latin typeface="Segoe UI"/>
               </a:rPr>
-              <a:t>Parte: 2 — Deep Learning · Fuente: Géron, cap. 18 § Q-Learning y § Deep Q-Learning.  Duración estimada: 80 min.</a:t>
+              <a:t>Parte: 2 — Deep Learning · Fuente: Géron, cap. 18 § Q-Learning y § Deep Q-Learning.  Duración estimada: 80 min. · Nivel: Avanzado</a:t>
             </a:r>
           </a:p>
         </p:txBody>
